--- a/Presentacion_Asignacion_VuelosGates.pptx
+++ b/Presentacion_Asignacion_VuelosGates.pptx
@@ -7388,7 +7388,7 @@
             <a:tbl>
               <a:tblPr>
                 <a:noFill/>
-                <a:tableStyleId>{1EACBFD3-367F-4D06-B59E-283CCBDB9967}</a:tableStyleId>
+                <a:tableStyleId>{DBD8EA12-1187-4A30-BC3E-C45968364C9D}</a:tableStyleId>
               </a:tblPr>
               <a:tblGrid>
                 <a:gridCol w="3383275"/>
@@ -19243,7 +19243,7 @@
                 <a:cs typeface="Calibri"/>
                 <a:sym typeface="Calibri"/>
               </a:rPr>
-              <a:t>Notebook: Asignacion_VuelosGates_Solucion_Final_Revisado.ipynb</a:t>
+              <a:t>Notebook: Asignacion_VuelosGates_Solucion.ipynb</a:t>
             </a:r>
             <a:endParaRPr b="0" i="0" sz="1200" u="none" cap="none" strike="noStrike">
               <a:solidFill>
@@ -19283,7 +19283,7 @@
                 <a:cs typeface="Calibri"/>
                 <a:sym typeface="Calibri"/>
               </a:rPr>
-              <a:t>Informe: Informe_Proyecto_Final_Asignacion_Vuelos_Gates_Actualizado.docx  ·  CSV por corrida en resultados finales iteración 2/</a:t>
+              <a:t>Informe: Informe_Proyecto_Final_Asignacion_Vuelos_Gates.docx</a:t>
             </a:r>
             <a:endParaRPr b="0" i="0" sz="1200" u="none" cap="none" strike="noStrike">
               <a:solidFill>
